--- a/.lessons/1 Install old laravel/install old laravel.pptx
+++ b/.lessons/1 Install old laravel/install old laravel.pptx
@@ -261,7 +261,7 @@
           <a:p>
             <a:fld id="{3E102D2E-813C-461C-9963-687A650C48C0}" type="datetimeFigureOut">
               <a:rPr lang="en-US" smtClean="0"/>
-              <a:t>4/12/2025</a:t>
+              <a:t>5/13/2025</a:t>
             </a:fld>
             <a:endParaRPr lang="en-US"/>
           </a:p>
@@ -459,7 +459,7 @@
           <a:p>
             <a:fld id="{3E102D2E-813C-461C-9963-687A650C48C0}" type="datetimeFigureOut">
               <a:rPr lang="en-US" smtClean="0"/>
-              <a:t>4/12/2025</a:t>
+              <a:t>5/13/2025</a:t>
             </a:fld>
             <a:endParaRPr lang="en-US"/>
           </a:p>
@@ -667,7 +667,7 @@
           <a:p>
             <a:fld id="{3E102D2E-813C-461C-9963-687A650C48C0}" type="datetimeFigureOut">
               <a:rPr lang="en-US" smtClean="0"/>
-              <a:t>4/12/2025</a:t>
+              <a:t>5/13/2025</a:t>
             </a:fld>
             <a:endParaRPr lang="en-US"/>
           </a:p>
@@ -865,7 +865,7 @@
           <a:p>
             <a:fld id="{3E102D2E-813C-461C-9963-687A650C48C0}" type="datetimeFigureOut">
               <a:rPr lang="en-US" smtClean="0"/>
-              <a:t>4/12/2025</a:t>
+              <a:t>5/13/2025</a:t>
             </a:fld>
             <a:endParaRPr lang="en-US"/>
           </a:p>
@@ -1140,7 +1140,7 @@
           <a:p>
             <a:fld id="{3E102D2E-813C-461C-9963-687A650C48C0}" type="datetimeFigureOut">
               <a:rPr lang="en-US" smtClean="0"/>
-              <a:t>4/12/2025</a:t>
+              <a:t>5/13/2025</a:t>
             </a:fld>
             <a:endParaRPr lang="en-US"/>
           </a:p>
@@ -1405,7 +1405,7 @@
           <a:p>
             <a:fld id="{3E102D2E-813C-461C-9963-687A650C48C0}" type="datetimeFigureOut">
               <a:rPr lang="en-US" smtClean="0"/>
-              <a:t>4/12/2025</a:t>
+              <a:t>5/13/2025</a:t>
             </a:fld>
             <a:endParaRPr lang="en-US"/>
           </a:p>
@@ -1817,7 +1817,7 @@
           <a:p>
             <a:fld id="{3E102D2E-813C-461C-9963-687A650C48C0}" type="datetimeFigureOut">
               <a:rPr lang="en-US" smtClean="0"/>
-              <a:t>4/12/2025</a:t>
+              <a:t>5/13/2025</a:t>
             </a:fld>
             <a:endParaRPr lang="en-US"/>
           </a:p>
@@ -1958,7 +1958,7 @@
           <a:p>
             <a:fld id="{3E102D2E-813C-461C-9963-687A650C48C0}" type="datetimeFigureOut">
               <a:rPr lang="en-US" smtClean="0"/>
-              <a:t>4/12/2025</a:t>
+              <a:t>5/13/2025</a:t>
             </a:fld>
             <a:endParaRPr lang="en-US"/>
           </a:p>
@@ -2071,7 +2071,7 @@
           <a:p>
             <a:fld id="{3E102D2E-813C-461C-9963-687A650C48C0}" type="datetimeFigureOut">
               <a:rPr lang="en-US" smtClean="0"/>
-              <a:t>4/12/2025</a:t>
+              <a:t>5/13/2025</a:t>
             </a:fld>
             <a:endParaRPr lang="en-US"/>
           </a:p>
@@ -2382,7 +2382,7 @@
           <a:p>
             <a:fld id="{3E102D2E-813C-461C-9963-687A650C48C0}" type="datetimeFigureOut">
               <a:rPr lang="en-US" smtClean="0"/>
-              <a:t>4/12/2025</a:t>
+              <a:t>5/13/2025</a:t>
             </a:fld>
             <a:endParaRPr lang="en-US"/>
           </a:p>
@@ -2670,7 +2670,7 @@
           <a:p>
             <a:fld id="{3E102D2E-813C-461C-9963-687A650C48C0}" type="datetimeFigureOut">
               <a:rPr lang="en-US" smtClean="0"/>
-              <a:t>4/12/2025</a:t>
+              <a:t>5/13/2025</a:t>
             </a:fld>
             <a:endParaRPr lang="en-US"/>
           </a:p>
@@ -2911,7 +2911,7 @@
           <a:p>
             <a:fld id="{3E102D2E-813C-461C-9963-687A650C48C0}" type="datetimeFigureOut">
               <a:rPr lang="en-US" smtClean="0"/>
-              <a:t>4/12/2025</a:t>
+              <a:t>5/13/2025</a:t>
             </a:fld>
             <a:endParaRPr lang="en-US"/>
           </a:p>
@@ -3457,6 +3457,23 @@
               </a:rPr>
               <a:t>https://laravel.com/docs/9.x/installation</a:t>
             </a:r>
+            <a:r>
+              <a:rPr lang="en-US" sz="1300">
+                <a:solidFill>
+                  <a:srgbClr val="00B0F0"/>
+                </a:solidFill>
+                <a:latin typeface="Arial" panose="020B0604020202020204" pitchFamily="34" charset="0"/>
+                <a:cs typeface="Arial" panose="020B0604020202020204" pitchFamily="34" charset="0"/>
+              </a:rPr>
+              <a:t>    ( composer create-project laravel/laravel:^10.0 example-app )</a:t>
+            </a:r>
+            <a:endParaRPr lang="az-Latn-AZ" sz="1300">
+              <a:solidFill>
+                <a:srgbClr val="00B0F0"/>
+              </a:solidFill>
+              <a:latin typeface="Arial" panose="020B0604020202020204" pitchFamily="34" charset="0"/>
+              <a:cs typeface="Arial" panose="020B0604020202020204" pitchFamily="34" charset="0"/>
+            </a:endParaRPr>
           </a:p>
           <a:p>
             <a:endParaRPr lang="az-Latn-AZ" sz="1300">
